--- a/public/fun/pack/pptx/talkpro/발표템플릿프리미엄_31_사업제안_머스터드네이비.pptx
+++ b/public/fun/pack/pptx/talkpro/발표템플릿프리미엄_31_사업제안_머스터드네이비.pptx
@@ -115,12 +115,12 @@
   <p:extLst>
     <p:ext uri="{521415D9-36F7-43E2-AB2F-B90AF26B5E84}">
       <p14:sectionLst xmlns:p14="http://schemas.microsoft.com/office/powerpoint/2010/main">
-        <p14:section name="시작" id="{61538EBC-0765-4638-BF63-F3B17CE84AD6}">
+        <p14:section name="시작" id="{A8A5392B-AA7E-4022-B6AA-1CB97AC4C4C4}">
           <p14:sldIdLst>
             <p14:sldId id="256"/>
           </p14:sldIdLst>
         </p14:section>
-        <p14:section name="본문" id="{1D6D8343-86DB-4306-B777-2DABAE1287A7}">
+        <p14:section name="본문" id="{2EE42C05-EF0B-40AA-A43B-03819BC4327A}">
           <p14:sldIdLst>
             <p14:sldId id="257"/>
             <p14:sldId id="258"/>
@@ -131,7 +131,7 @@
             <p14:sldId id="263"/>
           </p14:sldIdLst>
         </p14:section>
-        <p14:section name="마무리" id="{6CF5E7DE-0683-41D5-9F2A-524A4F3E8A1F}">
+        <p14:section name="마무리" id="{FF5672E1-6880-42DF-890C-46E7E10A9371}">
           <p14:sldIdLst>
             <p14:sldId id="264"/>
           </p14:sldIdLst>
@@ -1977,7 +1977,7 @@
             </a:lvl1pPr>
           </a:lstStyle>
           <a:p>
-            <a:fld id="{DF2D7BF1-89A3-41B9-9E70-B724FAAB61BD}" type="slidenum">
+            <a:fld id="{43FCD16F-30A6-4600-BDD1-CA12D3B6DE74}" type="slidenum">
               <a:rPr lang="en-US"/>
               <a:t>‹#›</a:t>
             </a:fld>
@@ -2728,7 +2728,7 @@
             </a:lvl1pPr>
           </a:lstStyle>
           <a:p>
-            <a:fld id="{591F97D3-ECD6-4794-8B09-FEAC8C236A5A}" type="slidenum">
+            <a:fld id="{39C085A7-831B-4679-8E11-765CAC633CB8}" type="slidenum">
               <a:rPr lang="en-US"/>
               <a:t>‹#›</a:t>
             </a:fld>
@@ -3406,7 +3406,7 @@
             </a:lvl1pPr>
           </a:lstStyle>
           <a:p>
-            <a:fld id="{221519D6-ED16-4DB4-89A0-FAE51944A892}" type="slidenum">
+            <a:fld id="{083FFA44-6D2E-4CBC-B0BF-D572D9D738F8}" type="slidenum">
               <a:rPr lang="en-US"/>
               <a:t>‹#›</a:t>
             </a:fld>
@@ -4275,7 +4275,7 @@
           <a:p>
             <a:r>
               <a:rPr lang="ko-KR"/>
-              <a:t>0000. 00. 00</a:t>
+              <a:t>날짜 입력</a:t>
             </a:r>
           </a:p>
         </p:txBody>
@@ -4360,7 +4360,7 @@
           <a:bodyPr/>
           <a:lstStyle/>
           <a:p>
-            <a:fld id="{A1687D22-45D6-4BBD-A756-4C6912ADE590}" type="slidenum">
+            <a:fld id="{0C5F7993-30CB-4945-A2E4-D3318BB615C9}" type="slidenum">
               <a:rPr lang="en-US"/>
               <a:t>‹#›</a:t>
             </a:fld>
@@ -5462,7 +5462,7 @@
           <a:bodyPr/>
           <a:lstStyle/>
           <a:p>
-            <a:fld id="{51DD84AB-E7DE-44A1-9412-706273EC9F15}" type="slidenum">
+            <a:fld id="{D3C7A970-F7C7-41A2-8836-143E3F50BA2F}" type="slidenum">
               <a:rPr lang="en-US"/>
               <a:t>‹#›</a:t>
             </a:fld>
@@ -5550,7 +5550,7 @@
           <a:bodyPr/>
           <a:lstStyle/>
           <a:p>
-            <a:fld id="{E7B4391A-F998-4F33-A92C-720F54371C30}" type="slidenum">
+            <a:fld id="{B31084EB-7909-47BF-BCD3-32B456BED845}" type="slidenum">
               <a:rPr lang="en-US"/>
               <a:t>‹#›</a:t>
             </a:fld>
@@ -6448,7 +6448,7 @@
           <a:bodyPr/>
           <a:lstStyle/>
           <a:p>
-            <a:fld id="{E5399960-15DD-429A-9831-749D1CC03D3F}" type="slidenum">
+            <a:fld id="{45F22187-C484-4CD0-99C2-9CDF9E49B475}" type="slidenum">
               <a:rPr lang="en-US"/>
               <a:t>‹#›</a:t>
             </a:fld>
@@ -7046,7 +7046,7 @@
           <a:bodyPr/>
           <a:lstStyle/>
           <a:p>
-            <a:fld id="{7A24055F-4ACA-4058-A8AD-DE1427D547FE}" type="slidenum">
+            <a:fld id="{3687FA04-EDBE-4BC1-8000-79D69A88E526}" type="slidenum">
               <a:rPr lang="en-US"/>
               <a:t>‹#›</a:t>
             </a:fld>
@@ -7229,7 +7229,7 @@
           <a:bodyPr/>
           <a:lstStyle/>
           <a:p>
-            <a:fld id="{D1DE0C7E-9DF8-4128-AB0D-453848666E4D}" type="slidenum">
+            <a:fld id="{09374BFF-E3DC-4C7F-929C-CA02331D9363}" type="slidenum">
               <a:rPr lang="en-US"/>
               <a:t>‹#›</a:t>
             </a:fld>
@@ -8293,7 +8293,7 @@
           <a:bodyPr/>
           <a:lstStyle/>
           <a:p>
-            <a:fld id="{1D23C405-EC1B-4F3F-9DFB-423C8B91C8AB}" type="slidenum">
+            <a:fld id="{F3585675-8C41-4AFF-8C8D-0E5743CE5176}" type="slidenum">
               <a:rPr lang="en-US"/>
               <a:t>‹#›</a:t>
             </a:fld>
